--- a/toolkit/vave-board-pack.pptx
+++ b/toolkit/vave-board-pack.pptx
@@ -4571,7 +4571,7 @@
                 </a:solidFill>
                 <a:latin typeface="Calibri"/>
               </a:rPr>
-              <a:t>How it works: one product, six phases, about six weeks</a:t>
+              <a:t>How it works: one product, six phases, about a month, then monthly reviews</a:t>
             </a:r>
           </a:p>
         </p:txBody>
@@ -4994,7 +4994,7 @@
                 </a:solidFill>
                 <a:latin typeface="Calibri"/>
               </a:rPr>
-              <a:t>•  A team of 6–10 from design, manufacturing, purchasing, quality and finance</a:t>
+              <a:t>•  A team of 6–10 from design, manufacturing, purchasing, quality, finance, service and key suppliers</a:t>
             </a:r>
           </a:p>
           <a:p>
